--- a/media/resources/files/kyrgyz_recall/toptom-1-a.pptx
+++ b/media/resources/files/kyrgyz_recall/toptom-1-a.pptx
@@ -3155,7 +3155,7 @@
                 </a:solidFill>
                 <a:latin typeface="Arial"/>
               </a:rPr>
-              <a:t>Аралаш кайталоо - 5-6-класс</a:t>
+              <a:t>Аралаш кайталоо</a:t>
             </a:r>
           </a:p>
         </p:txBody>
@@ -6307,7 +6307,7 @@
                 </a:solidFill>
                 <a:latin typeface="Arial"/>
               </a:rPr>
-              <a:t>Аралаш кайталоо - 5-6-класс</a:t>
+              <a:t>Аралаш кайталоо</a:t>
             </a:r>
           </a:p>
         </p:txBody>
